--- a/build/session-04/session-04-slides.pptx
+++ b/build/session-04/session-04-slides.pptx
@@ -36,7 +36,6 @@
     <p:sldId id="281" r:id="rId28"/>
     <p:sldId id="282" r:id="rId29"/>
     <p:sldId id="283" r:id="rId30"/>
-    <p:sldId id="284" r:id="rId31"/>
   </p:sldIdLst>
   <p:sldSz cx="12192000" cy="6858000"/>
   <p:notesSz cx="6858000" cy="12192000"/>
@@ -174,53 +173,6 @@
           <a:p>
             <a:r>
               <a:rPr lang="en-US" dirty="0"/>
-              <a:t>Expected answer: degree $2$, leading coefficient $-1$; shift right $2$, up $3$, then reflect vertically; vertex $(2,3)$; both ends down. For roots, $-(x-2)^2+3=0$ is equivalent to $(x-2)^2=3$, then $x-2=\pm\sqrt3$, hence $x=2\pm\sqrt3$. The common mistake in the share prompt drops the horizontal shift.</a:t>
-            </a:r>
-          </a:p>
-        </p:txBody>
-      </p:sp>
-    </p:spTree>
-  </p:cSld>
-  <p:clrMapOvr>
-    <a:masterClrMapping/>
-  </p:clrMapOvr>
-</p:notes>
-</file>
-
-<file path=ppt/notesSlides/notesSlide11.xml><?xml version="1.0" encoding="utf-8"?>
-<p:notes xmlns:a="http://schemas.openxmlformats.org/drawingml/2006/main" xmlns:r="http://schemas.openxmlformats.org/officeDocument/2006/relationships" xmlns:p="http://schemas.openxmlformats.org/presentationml/2006/main">
-  <p:cSld>
-    <p:spTree>
-      <p:nvGrpSpPr>
-        <p:cNvPr id="1" name=""/>
-        <p:cNvGrpSpPr/>
-        <p:nvPr/>
-      </p:nvGrpSpPr>
-      <p:grpSpPr>
-        <a:xfrm>
-          <a:off x="0" y="0"/>
-          <a:ext cx="0" cy="0"/>
-          <a:chOff x="0" y="0"/>
-          <a:chExt cx="0" cy="0"/>
-        </a:xfrm>
-      </p:grpSpPr>
-      <p:sp>
-        <p:nvSpPr>
-          <p:cNvPr id="2" name="Notes Placeholder 11"/>
-          <p:cNvSpPr>
-            <a:spLocks noGrp="1"/>
-          </p:cNvSpPr>
-          <p:nvPr>
-            <p:ph type="body" idx="1"/>
-          </p:nvPr>
-        </p:nvSpPr>
-        <p:spPr/>
-        <p:txBody>
-          <a:bodyPr/>
-          <a:lstStyle/>
-          <a:p>
-            <a:r>
-              <a:rPr lang="en-US" dirty="0"/>
               <a:t>Do not put this up until every group has committed to an answer. Walk the four method steps in order and ask which step each group actually skipped — it is almost always step 4. Write $x-2=\pm\sqrt3$ on the board as a single line with two solutions, and say aloud that the $\pm$ is where a solution gets silently lost for the rest of their lives.</a:t>
             </a:r>
           </a:p>
@@ -234,7 +186,7 @@
 </p:notes>
 </file>
 
-<file path=ppt/notesSlides/notesSlide12.xml><?xml version="1.0" encoding="utf-8"?>
+<file path=ppt/notesSlides/notesSlide11.xml><?xml version="1.0" encoding="utf-8"?>
 <p:notes xmlns:a="http://schemas.openxmlformats.org/drawingml/2006/main" xmlns:r="http://schemas.openxmlformats.org/officeDocument/2006/relationships" xmlns:p="http://schemas.openxmlformats.org/presentationml/2006/main">
   <p:cSld>
     <p:spTree>
@@ -253,7 +205,7 @@
       </p:grpSpPr>
       <p:sp>
         <p:nvSpPr>
-          <p:cNvPr id="2" name="Notes Placeholder 12"/>
+          <p:cNvPr id="2" name="Notes Placeholder 11"/>
           <p:cNvSpPr>
             <a:spLocks noGrp="1"/>
           </p:cNvSpPr>
@@ -281,7 +233,7 @@
 </p:notes>
 </file>
 
-<file path=ppt/notesSlides/notesSlide13.xml><?xml version="1.0" encoding="utf-8"?>
+<file path=ppt/notesSlides/notesSlide12.xml><?xml version="1.0" encoding="utf-8"?>
 <p:notes xmlns:a="http://schemas.openxmlformats.org/drawingml/2006/main" xmlns:r="http://schemas.openxmlformats.org/officeDocument/2006/relationships" xmlns:p="http://schemas.openxmlformats.org/presentationml/2006/main">
   <p:cSld>
     <p:spTree>
@@ -300,7 +252,7 @@
       </p:grpSpPr>
       <p:sp>
         <p:nvSpPr>
-          <p:cNvPr id="2" name="Notes Placeholder 13"/>
+          <p:cNvPr id="2" name="Notes Placeholder 12"/>
           <p:cNvSpPr>
             <a:spLocks noGrp="1"/>
           </p:cNvSpPr>
@@ -328,7 +280,7 @@
 </p:notes>
 </file>
 
-<file path=ppt/notesSlides/notesSlide14.xml><?xml version="1.0" encoding="utf-8"?>
+<file path=ppt/notesSlides/notesSlide13.xml><?xml version="1.0" encoding="utf-8"?>
 <p:notes xmlns:a="http://schemas.openxmlformats.org/drawingml/2006/main" xmlns:r="http://schemas.openxmlformats.org/officeDocument/2006/relationships" xmlns:p="http://schemas.openxmlformats.org/presentationml/2006/main">
   <p:cSld>
     <p:spTree>
@@ -347,7 +299,7 @@
       </p:grpSpPr>
       <p:sp>
         <p:nvSpPr>
-          <p:cNvPr id="2" name="Notes Placeholder 14"/>
+          <p:cNvPr id="2" name="Notes Placeholder 13"/>
           <p:cNvSpPr>
             <a:spLocks noGrp="1"/>
           </p:cNvSpPr>
@@ -375,7 +327,7 @@
 </p:notes>
 </file>
 
-<file path=ppt/notesSlides/notesSlide15.xml><?xml version="1.0" encoding="utf-8"?>
+<file path=ppt/notesSlides/notesSlide14.xml><?xml version="1.0" encoding="utf-8"?>
 <p:notes xmlns:a="http://schemas.openxmlformats.org/drawingml/2006/main" xmlns:r="http://schemas.openxmlformats.org/officeDocument/2006/relationships" xmlns:p="http://schemas.openxmlformats.org/presentationml/2006/main">
   <p:cSld>
     <p:spTree>
@@ -394,7 +346,7 @@
       </p:grpSpPr>
       <p:sp>
         <p:nvSpPr>
-          <p:cNvPr id="2" name="Notes Placeholder 15"/>
+          <p:cNvPr id="2" name="Notes Placeholder 14"/>
           <p:cNvSpPr>
             <a:spLocks noGrp="1"/>
           </p:cNvSpPr>
@@ -422,7 +374,7 @@
 </p:notes>
 </file>
 
-<file path=ppt/notesSlides/notesSlide16.xml><?xml version="1.0" encoding="utf-8"?>
+<file path=ppt/notesSlides/notesSlide15.xml><?xml version="1.0" encoding="utf-8"?>
 <p:notes xmlns:a="http://schemas.openxmlformats.org/drawingml/2006/main" xmlns:r="http://schemas.openxmlformats.org/officeDocument/2006/relationships" xmlns:p="http://schemas.openxmlformats.org/presentationml/2006/main">
   <p:cSld>
     <p:spTree>
@@ -441,7 +393,7 @@
       </p:grpSpPr>
       <p:sp>
         <p:nvSpPr>
-          <p:cNvPr id="2" name="Notes Placeholder 16"/>
+          <p:cNvPr id="2" name="Notes Placeholder 15"/>
           <p:cNvSpPr>
             <a:spLocks noGrp="1"/>
           </p:cNvSpPr>
@@ -469,7 +421,7 @@
 </p:notes>
 </file>
 
-<file path=ppt/notesSlides/notesSlide17.xml><?xml version="1.0" encoding="utf-8"?>
+<file path=ppt/notesSlides/notesSlide16.xml><?xml version="1.0" encoding="utf-8"?>
 <p:notes xmlns:a="http://schemas.openxmlformats.org/drawingml/2006/main" xmlns:r="http://schemas.openxmlformats.org/officeDocument/2006/relationships" xmlns:p="http://schemas.openxmlformats.org/presentationml/2006/main">
   <p:cSld>
     <p:spTree>
@@ -488,7 +440,7 @@
       </p:grpSpPr>
       <p:sp>
         <p:nvSpPr>
-          <p:cNvPr id="2" name="Notes Placeholder 17"/>
+          <p:cNvPr id="2" name="Notes Placeholder 16"/>
           <p:cNvSpPr>
             <a:spLocks noGrp="1"/>
           </p:cNvSpPr>
@@ -516,7 +468,7 @@
 </p:notes>
 </file>
 
-<file path=ppt/notesSlides/notesSlide18.xml><?xml version="1.0" encoding="utf-8"?>
+<file path=ppt/notesSlides/notesSlide17.xml><?xml version="1.0" encoding="utf-8"?>
 <p:notes xmlns:a="http://schemas.openxmlformats.org/drawingml/2006/main" xmlns:r="http://schemas.openxmlformats.org/officeDocument/2006/relationships" xmlns:p="http://schemas.openxmlformats.org/presentationml/2006/main">
   <p:cSld>
     <p:spTree>
@@ -535,7 +487,7 @@
       </p:grpSpPr>
       <p:sp>
         <p:nvSpPr>
-          <p:cNvPr id="2" name="Notes Placeholder 18"/>
+          <p:cNvPr id="2" name="Notes Placeholder 17"/>
           <p:cNvSpPr>
             <a:spLocks noGrp="1"/>
           </p:cNvSpPr>
@@ -563,6 +515,53 @@
 </p:notes>
 </file>
 
+<file path=ppt/notesSlides/notesSlide18.xml><?xml version="1.0" encoding="utf-8"?>
+<p:notes xmlns:a="http://schemas.openxmlformats.org/drawingml/2006/main" xmlns:r="http://schemas.openxmlformats.org/officeDocument/2006/relationships" xmlns:p="http://schemas.openxmlformats.org/presentationml/2006/main">
+  <p:cSld>
+    <p:spTree>
+      <p:nvGrpSpPr>
+        <p:cNvPr id="1" name=""/>
+        <p:cNvGrpSpPr/>
+        <p:nvPr/>
+      </p:nvGrpSpPr>
+      <p:grpSpPr>
+        <a:xfrm>
+          <a:off x="0" y="0"/>
+          <a:ext cx="0" cy="0"/>
+          <a:chOff x="0" y="0"/>
+          <a:chExt cx="0" cy="0"/>
+        </a:xfrm>
+      </p:grpSpPr>
+      <p:sp>
+        <p:nvSpPr>
+          <p:cNvPr id="2" name="Notes Placeholder 18"/>
+          <p:cNvSpPr>
+            <a:spLocks noGrp="1"/>
+          </p:cNvSpPr>
+          <p:nvPr>
+            <p:ph type="body" idx="1"/>
+          </p:nvPr>
+        </p:nvSpPr>
+        <p:spPr/>
+        <p:txBody>
+          <a:bodyPr/>
+          <a:lstStyle/>
+          <a:p>
+            <a:r>
+              <a:rPr lang="en-US" dirty="0"/>
+              <a:t>The whole activity exists to make step 1 a habit rather than a decoration. Ask who wrote the domain down before solving; usually very few. Point out that step 3 is legal only because step 1 guaranteed the inputs are positive, and that step 4 is not optional politeness — the algebra in step 3 genuinely produces a value that is not a solution.</a:t>
+            </a:r>
+          </a:p>
+        </p:txBody>
+      </p:sp>
+    </p:spTree>
+  </p:cSld>
+  <p:clrMapOvr>
+    <a:masterClrMapping/>
+  </p:clrMapOvr>
+</p:notes>
+</file>
+
 <file path=ppt/notesSlides/notesSlide19.xml><?xml version="1.0" encoding="utf-8"?>
 <p:notes xmlns:a="http://schemas.openxmlformats.org/drawingml/2006/main" xmlns:r="http://schemas.openxmlformats.org/officeDocument/2006/relationships" xmlns:p="http://schemas.openxmlformats.org/presentationml/2006/main">
   <p:cSld>
@@ -597,7 +596,7 @@
           <a:p>
             <a:r>
               <a:rPr lang="en-US" dirty="0"/>
-              <a:t>The whole activity exists to make step 1 a habit rather than a decoration. Ask who wrote the domain down before solving; usually very few. Point out that step 3 is legal only because step 1 guaranteed the inputs are positive, and that step 4 is not optional politeness — the algebra in step 3 genuinely produces a value that is not a solution.</a:t>
+              <a:t>For base change, choose $a=e$ in practice: $\log_bx=\ln x/\ln b$. The growth statement assumes any fixed logarithm base greater than $1$; bases between $0$ and $1$ give negative logarithms for $n&gt;1$ and are not the intended growth convention. Give a finite comparison: $2^3=8&lt;3^2=9$, but $2^{10}=1024&gt;10^2=100$. We use the formal notation $\log n=o(n^k)$ and $n^k=o(c^n)$ only as optional vocabulary, not as required knowledge.</a:t>
             </a:r>
           </a:p>
         </p:txBody>
@@ -691,53 +690,6 @@
           <a:p>
             <a:r>
               <a:rPr lang="en-US" dirty="0"/>
-              <a:t>For base change, choose $a=e$ in practice: $\log_bx=\ln x/\ln b$. The growth statement assumes any fixed logarithm base greater than $1$; bases between $0$ and $1$ give negative logarithms for $n&gt;1$ and are not the intended growth convention. Give a finite comparison: $2^3=8&lt;3^2=9$, but $2^{10}=1024&gt;10^2=100$. We use the formal notation $\log n=o(n^k)$ and $n^k=o(c^n)$ only as optional vocabulary, not as required knowledge.</a:t>
-            </a:r>
-          </a:p>
-        </p:txBody>
-      </p:sp>
-    </p:spTree>
-  </p:cSld>
-  <p:clrMapOvr>
-    <a:masterClrMapping/>
-  </p:clrMapOvr>
-</p:notes>
-</file>
-
-<file path=ppt/notesSlides/notesSlide21.xml><?xml version="1.0" encoding="utf-8"?>
-<p:notes xmlns:a="http://schemas.openxmlformats.org/drawingml/2006/main" xmlns:r="http://schemas.openxmlformats.org/officeDocument/2006/relationships" xmlns:p="http://schemas.openxmlformats.org/presentationml/2006/main">
-  <p:cSld>
-    <p:spTree>
-      <p:nvGrpSpPr>
-        <p:cNvPr id="1" name=""/>
-        <p:cNvGrpSpPr/>
-        <p:nvPr/>
-      </p:nvGrpSpPr>
-      <p:grpSpPr>
-        <a:xfrm>
-          <a:off x="0" y="0"/>
-          <a:ext cx="0" cy="0"/>
-          <a:chOff x="0" y="0"/>
-          <a:chExt cx="0" cy="0"/>
-        </a:xfrm>
-      </p:grpSpPr>
-      <p:sp>
-        <p:nvSpPr>
-          <p:cNvPr id="2" name="Notes Placeholder 21"/>
-          <p:cNvSpPr>
-            <a:spLocks noGrp="1"/>
-          </p:cNvSpPr>
-          <p:nvPr>
-            <p:ph type="body" idx="1"/>
-          </p:nvPr>
-        </p:nvSpPr>
-        <p:spPr/>
-        <p:txBody>
-          <a:bodyPr/>
-          <a:lstStyle/>
-          <a:p>
-            <a:r>
-              <a:rPr lang="en-US" dirty="0"/>
               <a:t>Ranking: $\log_2n&lt;n&lt;n\log_2n&lt;n^2&lt;2^n$ eventually. For $n&gt;2$, $\log_2n&gt;1$, so $n\log_2n&gt;n$. The step $n\log n&lt;n^2$ eventually follows from $\log n&lt;n$ eventually. The exponential term is the dangerous one for large inputs, but remind students that implementation constants and input size still matter in real computing.</a:t>
             </a:r>
           </a:p>
@@ -751,7 +703,7 @@
 </p:notes>
 </file>
 
-<file path=ppt/notesSlides/notesSlide22.xml><?xml version="1.0" encoding="utf-8"?>
+<file path=ppt/notesSlides/notesSlide21.xml><?xml version="1.0" encoding="utf-8"?>
 <p:notes xmlns:a="http://schemas.openxmlformats.org/drawingml/2006/main" xmlns:r="http://schemas.openxmlformats.org/officeDocument/2006/relationships" xmlns:p="http://schemas.openxmlformats.org/presentationml/2006/main">
   <p:cSld>
     <p:spTree>
@@ -770,7 +722,7 @@
       </p:grpSpPr>
       <p:sp>
         <p:nvSpPr>
-          <p:cNvPr id="2" name="Notes Placeholder 22"/>
+          <p:cNvPr id="2" name="Notes Placeholder 21"/>
           <p:cNvSpPr>
             <a:spLocks noGrp="1"/>
           </p:cNvSpPr>
@@ -798,7 +750,7 @@
 </p:notes>
 </file>
 
-<file path=ppt/notesSlides/notesSlide23.xml><?xml version="1.0" encoding="utf-8"?>
+<file path=ppt/notesSlides/notesSlide22.xml><?xml version="1.0" encoding="utf-8"?>
 <p:notes xmlns:a="http://schemas.openxmlformats.org/drawingml/2006/main" xmlns:r="http://schemas.openxmlformats.org/officeDocument/2006/relationships" xmlns:p="http://schemas.openxmlformats.org/presentationml/2006/main">
   <p:cSld>
     <p:spTree>
@@ -817,7 +769,7 @@
       </p:grpSpPr>
       <p:sp>
         <p:nvSpPr>
-          <p:cNvPr id="2" name="Notes Placeholder 23"/>
+          <p:cNvPr id="2" name="Notes Placeholder 22"/>
           <p:cNvSpPr>
             <a:spLocks noGrp="1"/>
           </p:cNvSpPr>
@@ -845,7 +797,7 @@
 </p:notes>
 </file>
 
-<file path=ppt/notesSlides/notesSlide24.xml><?xml version="1.0" encoding="utf-8"?>
+<file path=ppt/notesSlides/notesSlide23.xml><?xml version="1.0" encoding="utf-8"?>
 <p:notes xmlns:a="http://schemas.openxmlformats.org/drawingml/2006/main" xmlns:r="http://schemas.openxmlformats.org/officeDocument/2006/relationships" xmlns:p="http://schemas.openxmlformats.org/presentationml/2006/main">
   <p:cSld>
     <p:spTree>
@@ -864,7 +816,7 @@
       </p:grpSpPr>
       <p:sp>
         <p:nvSpPr>
-          <p:cNvPr id="2" name="Notes Placeholder 24"/>
+          <p:cNvPr id="2" name="Notes Placeholder 23"/>
           <p:cNvSpPr>
             <a:spLocks noGrp="1"/>
           </p:cNvSpPr>
@@ -892,7 +844,7 @@
 </p:notes>
 </file>
 
-<file path=ppt/notesSlides/notesSlide25.xml><?xml version="1.0" encoding="utf-8"?>
+<file path=ppt/notesSlides/notesSlide24.xml><?xml version="1.0" encoding="utf-8"?>
 <p:notes xmlns:a="http://schemas.openxmlformats.org/drawingml/2006/main" xmlns:r="http://schemas.openxmlformats.org/officeDocument/2006/relationships" xmlns:p="http://schemas.openxmlformats.org/presentationml/2006/main">
   <p:cSld>
     <p:spTree>
@@ -911,7 +863,7 @@
       </p:grpSpPr>
       <p:sp>
         <p:nvSpPr>
-          <p:cNvPr id="2" name="Notes Placeholder 25"/>
+          <p:cNvPr id="2" name="Notes Placeholder 24"/>
           <p:cNvSpPr>
             <a:spLocks noGrp="1"/>
           </p:cNvSpPr>
@@ -939,7 +891,7 @@
 </p:notes>
 </file>
 
-<file path=ppt/notesSlides/notesSlide26.xml><?xml version="1.0" encoding="utf-8"?>
+<file path=ppt/notesSlides/notesSlide25.xml><?xml version="1.0" encoding="utf-8"?>
 <p:notes xmlns:a="http://schemas.openxmlformats.org/drawingml/2006/main" xmlns:r="http://schemas.openxmlformats.org/officeDocument/2006/relationships" xmlns:p="http://schemas.openxmlformats.org/presentationml/2006/main">
   <p:cSld>
     <p:spTree>
@@ -958,7 +910,7 @@
       </p:grpSpPr>
       <p:sp>
         <p:nvSpPr>
-          <p:cNvPr id="2" name="Notes Placeholder 26"/>
+          <p:cNvPr id="2" name="Notes Placeholder 25"/>
           <p:cNvSpPr>
             <a:spLocks noGrp="1"/>
           </p:cNvSpPr>
@@ -986,7 +938,7 @@
 </p:notes>
 </file>
 
-<file path=ppt/notesSlides/notesSlide27.xml><?xml version="1.0" encoding="utf-8"?>
+<file path=ppt/notesSlides/notesSlide26.xml><?xml version="1.0" encoding="utf-8"?>
 <p:notes xmlns:a="http://schemas.openxmlformats.org/drawingml/2006/main" xmlns:r="http://schemas.openxmlformats.org/officeDocument/2006/relationships" xmlns:p="http://schemas.openxmlformats.org/presentationml/2006/main">
   <p:cSld>
     <p:spTree>
@@ -1005,7 +957,7 @@
       </p:grpSpPr>
       <p:sp>
         <p:nvSpPr>
-          <p:cNvPr id="2" name="Notes Placeholder 27"/>
+          <p:cNvPr id="2" name="Notes Placeholder 26"/>
           <p:cNvSpPr>
             <a:spLocks noGrp="1"/>
           </p:cNvSpPr>
@@ -1033,7 +985,7 @@
 </p:notes>
 </file>
 
-<file path=ppt/notesSlides/notesSlide28.xml><?xml version="1.0" encoding="utf-8"?>
+<file path=ppt/notesSlides/notesSlide27.xml><?xml version="1.0" encoding="utf-8"?>
 <p:notes xmlns:a="http://schemas.openxmlformats.org/drawingml/2006/main" xmlns:r="http://schemas.openxmlformats.org/officeDocument/2006/relationships" xmlns:p="http://schemas.openxmlformats.org/presentationml/2006/main">
   <p:cSld>
     <p:spTree>
@@ -1052,7 +1004,7 @@
       </p:grpSpPr>
       <p:sp>
         <p:nvSpPr>
-          <p:cNvPr id="2" name="Notes Placeholder 28"/>
+          <p:cNvPr id="2" name="Notes Placeholder 27"/>
           <p:cNvSpPr>
             <a:spLocks noGrp="1"/>
           </p:cNvSpPr>
@@ -1080,7 +1032,7 @@
 </p:notes>
 </file>
 
-<file path=ppt/notesSlides/notesSlide29.xml><?xml version="1.0" encoding="utf-8"?>
+<file path=ppt/notesSlides/notesSlide28.xml><?xml version="1.0" encoding="utf-8"?>
 <p:notes xmlns:a="http://schemas.openxmlformats.org/drawingml/2006/main" xmlns:r="http://schemas.openxmlformats.org/officeDocument/2006/relationships" xmlns:p="http://schemas.openxmlformats.org/presentationml/2006/main">
   <p:cSld>
     <p:spTree>
@@ -1099,7 +1051,7 @@
       </p:grpSpPr>
       <p:sp>
         <p:nvSpPr>
-          <p:cNvPr id="2" name="Notes Placeholder 29"/>
+          <p:cNvPr id="2" name="Notes Placeholder 28"/>
           <p:cNvSpPr>
             <a:spLocks noGrp="1"/>
           </p:cNvSpPr>
@@ -1161,7 +1113,7 @@
           <a:p>
             <a:r>
               <a:rPr lang="en-US" dirty="0"/>
-              <a:t>Ask for predictions, not answers from memory. At $x=1$, $x^2=1$ and $2^x=2$; at $x=3$, $9&gt;8$; at $x=10$, $1024&gt;100$. This makes the need for the word "eventually" visible. Do not yet claim a formal growth theorem; it appears later.</a:t>
+              <a:t>This slide replaces the warm-up and the objectives, so it has to do both jobs in ten minutes. Do not read the tables out. Put them up, give the room ninety seconds to find the one line they cannot explain, and take three of those. Two lines carry today: codomain is declared, image is computed — every family today gets asked for its domain and range — and restrict until bijective , because that is the only reason $\log$ and $\arcsin$ exist at all. Then run the warm-up. Ask for predictions, not answers from memory. At $x=1$, $x^2=1$ and $2^x=2$; at $x=3$, $9&gt;8$; at $x=10$, $1024&gt;100$. That makes the need for the word "eventually" visible. Do not yet claim a formal growth theorem; it appears later. Today's assessed skill is explaining why a rule may be used, not only using it: degree and end behaviour, exponent and log laws with their conditions, base change, growth comparison, and reading amplitude, period and shift off a transformed graph.</a:t>
             </a:r>
           </a:p>
         </p:txBody>
@@ -1194,53 +1146,6 @@
       <p:sp>
         <p:nvSpPr>
           <p:cNvPr id="2" name="Notes Placeholder 4"/>
-          <p:cNvSpPr>
-            <a:spLocks noGrp="1"/>
-          </p:cNvSpPr>
-          <p:nvPr>
-            <p:ph type="body" idx="1"/>
-          </p:nvPr>
-        </p:nvSpPr>
-        <p:spPr/>
-        <p:txBody>
-          <a:bodyPr/>
-          <a:lstStyle/>
-          <a:p>
-            <a:r>
-              <a:rPr lang="en-US" dirty="0"/>
-              <a:t>Read the objectives aloud. "Possible roots" is deliberate: a degree-$n$ polynomial has at most $n$ distinct real roots, not necessarily exactly $n$. The three family sections each return to the same questions: domain, range, shape, and rate of change.</a:t>
-            </a:r>
-          </a:p>
-        </p:txBody>
-      </p:sp>
-    </p:spTree>
-  </p:cSld>
-  <p:clrMapOvr>
-    <a:masterClrMapping/>
-  </p:clrMapOvr>
-</p:notes>
-</file>
-
-<file path=ppt/notesSlides/notesSlide5.xml><?xml version="1.0" encoding="utf-8"?>
-<p:notes xmlns:a="http://schemas.openxmlformats.org/drawingml/2006/main" xmlns:r="http://schemas.openxmlformats.org/officeDocument/2006/relationships" xmlns:p="http://schemas.openxmlformats.org/presentationml/2006/main">
-  <p:cSld>
-    <p:spTree>
-      <p:nvGrpSpPr>
-        <p:cNvPr id="1" name=""/>
-        <p:cNvGrpSpPr/>
-        <p:nvPr/>
-      </p:nvGrpSpPr>
-      <p:grpSpPr>
-        <a:xfrm>
-          <a:off x="0" y="0"/>
-          <a:ext cx="0" cy="0"/>
-          <a:chOff x="0" y="0"/>
-          <a:chExt cx="0" cy="0"/>
-        </a:xfrm>
-      </p:grpSpPr>
-      <p:sp>
-        <p:nvSpPr>
-          <p:cNvPr id="2" name="Notes Placeholder 5"/>
           <p:cNvSpPr>
             <a:spLocks noGrp="1"/>
           </p:cNvSpPr>
@@ -1268,7 +1173,7 @@
 </p:notes>
 </file>
 
-<file path=ppt/notesSlides/notesSlide6.xml><?xml version="1.0" encoding="utf-8"?>
+<file path=ppt/notesSlides/notesSlide5.xml><?xml version="1.0" encoding="utf-8"?>
 <p:notes xmlns:a="http://schemas.openxmlformats.org/drawingml/2006/main" xmlns:r="http://schemas.openxmlformats.org/officeDocument/2006/relationships" xmlns:p="http://schemas.openxmlformats.org/presentationml/2006/main">
   <p:cSld>
     <p:spTree>
@@ -1287,7 +1192,7 @@
       </p:grpSpPr>
       <p:sp>
         <p:nvSpPr>
-          <p:cNvPr id="2" name="Notes Placeholder 6"/>
+          <p:cNvPr id="2" name="Notes Placeholder 5"/>
           <p:cNvSpPr>
             <a:spLocks noGrp="1"/>
           </p:cNvSpPr>
@@ -1315,7 +1220,7 @@
 </p:notes>
 </file>
 
-<file path=ppt/notesSlides/notesSlide7.xml><?xml version="1.0" encoding="utf-8"?>
+<file path=ppt/notesSlides/notesSlide6.xml><?xml version="1.0" encoding="utf-8"?>
 <p:notes xmlns:a="http://schemas.openxmlformats.org/drawingml/2006/main" xmlns:r="http://schemas.openxmlformats.org/officeDocument/2006/relationships" xmlns:p="http://schemas.openxmlformats.org/presentationml/2006/main">
   <p:cSld>
     <p:spTree>
@@ -1334,7 +1239,7 @@
       </p:grpSpPr>
       <p:sp>
         <p:nvSpPr>
-          <p:cNvPr id="2" name="Notes Placeholder 7"/>
+          <p:cNvPr id="2" name="Notes Placeholder 6"/>
           <p:cNvSpPr>
             <a:spLocks noGrp="1"/>
           </p:cNvSpPr>
@@ -1362,7 +1267,7 @@
 </p:notes>
 </file>
 
-<file path=ppt/notesSlides/notesSlide8.xml><?xml version="1.0" encoding="utf-8"?>
+<file path=ppt/notesSlides/notesSlide7.xml><?xml version="1.0" encoding="utf-8"?>
 <p:notes xmlns:a="http://schemas.openxmlformats.org/drawingml/2006/main" xmlns:r="http://schemas.openxmlformats.org/officeDocument/2006/relationships" xmlns:p="http://schemas.openxmlformats.org/presentationml/2006/main">
   <p:cSld>
     <p:spTree>
@@ -1381,7 +1286,7 @@
       </p:grpSpPr>
       <p:sp>
         <p:nvSpPr>
-          <p:cNvPr id="2" name="Notes Placeholder 8"/>
+          <p:cNvPr id="2" name="Notes Placeholder 7"/>
           <p:cNvSpPr>
             <a:spLocks noGrp="1"/>
           </p:cNvSpPr>
@@ -1409,6 +1314,53 @@
 </p:notes>
 </file>
 
+<file path=ppt/notesSlides/notesSlide8.xml><?xml version="1.0" encoding="utf-8"?>
+<p:notes xmlns:a="http://schemas.openxmlformats.org/drawingml/2006/main" xmlns:r="http://schemas.openxmlformats.org/officeDocument/2006/relationships" xmlns:p="http://schemas.openxmlformats.org/presentationml/2006/main">
+  <p:cSld>
+    <p:spTree>
+      <p:nvGrpSpPr>
+        <p:cNvPr id="1" name=""/>
+        <p:cNvGrpSpPr/>
+        <p:nvPr/>
+      </p:nvGrpSpPr>
+      <p:grpSpPr>
+        <a:xfrm>
+          <a:off x="0" y="0"/>
+          <a:ext cx="0" cy="0"/>
+          <a:chOff x="0" y="0"/>
+          <a:chExt cx="0" cy="0"/>
+        </a:xfrm>
+      </p:grpSpPr>
+      <p:sp>
+        <p:nvSpPr>
+          <p:cNvPr id="2" name="Notes Placeholder 8"/>
+          <p:cNvSpPr>
+            <a:spLocks noGrp="1"/>
+          </p:cNvSpPr>
+          <p:nvPr>
+            <p:ph type="body" idx="1"/>
+          </p:nvPr>
+        </p:nvSpPr>
+        <p:spPr/>
+        <p:txBody>
+          <a:bodyPr/>
+          <a:lstStyle/>
+          <a:p>
+            <a:r>
+              <a:rPr lang="en-US" dirty="0"/>
+              <a:t>Substitute each root: $p(-2)=0$, $p(0)=0$, and $p(2)=0$. The "at most" statement is important: $x^2+1$ has no real roots, while $(x-1)^2$ has one distinct real root but degree $2$. Briefly justify the theorem: each distinct root supplies a distinct linear factor, and a degree-$n$ polynomial cannot contain more than $n$ such factors. A full complex-root statement comes in Session 13.</a:t>
+            </a:r>
+          </a:p>
+        </p:txBody>
+      </p:sp>
+    </p:spTree>
+  </p:cSld>
+  <p:clrMapOvr>
+    <a:masterClrMapping/>
+  </p:clrMapOvr>
+</p:notes>
+</file>
+
 <file path=ppt/notesSlides/notesSlide9.xml><?xml version="1.0" encoding="utf-8"?>
 <p:notes xmlns:a="http://schemas.openxmlformats.org/drawingml/2006/main" xmlns:r="http://schemas.openxmlformats.org/officeDocument/2006/relationships" xmlns:p="http://schemas.openxmlformats.org/presentationml/2006/main">
   <p:cSld>
@@ -1443,7 +1395,7 @@
           <a:p>
             <a:r>
               <a:rPr lang="en-US" dirty="0"/>
-              <a:t>Substitute each root: $p(-2)=0$, $p(0)=0$, and $p(2)=0$. The "at most" statement is important: $x^2+1$ has no real roots, while $(x-1)^2$ has one distinct real root but degree $2$. Briefly justify the theorem: each distinct root supplies a distinct linear factor, and a degree-$n$ polynomial cannot contain more than $n$ such factors. A full complex-root statement comes in Session 13.</a:t>
+              <a:t>Expected answer: degree $2$, leading coefficient $-1$; shift right $2$, up $3$, then reflect vertically; vertex $(2,3)$; both ends down. For roots, $-(x-2)^2+3=0$ is equivalent to $(x-2)^2=3$, then $x-2=\pm\sqrt3$, hence $x=2\pm\sqrt3$. The common mistake in the share prompt drops the horizontal shift.</a:t>
             </a:r>
           </a:p>
         </p:txBody>
@@ -2515,55 +2467,6 @@
       <p:pic>
         <p:nvPicPr>
           <p:cNvPr id="2" name="Slide 28"/>
-          <p:cNvPicPr>
-            <a:picLocks noChangeAspect="1"/>
-          </p:cNvPicPr>
-          <p:nvPr/>
-        </p:nvPicPr>
-        <p:blipFill>
-          <a:blip r:embed="rId2"/>
-          <a:stretch>
-            <a:fillRect/>
-          </a:stretch>
-        </p:blipFill>
-        <p:spPr>
-          <a:xfrm>
-            <a:off x="0" y="0"/>
-            <a:ext cx="12192000" cy="6858000"/>
-          </a:xfrm>
-          <a:prstGeom prst="rect">
-            <a:avLst/>
-          </a:prstGeom>
-        </p:spPr>
-      </p:pic>
-    </p:spTree>
-  </p:cSld>
-  <p:clrMapOvr>
-    <a:masterClrMapping/>
-  </p:clrMapOvr>
-</p:sld>
-</file>
-
-<file path=ppt/slides/slide29.xml><?xml version="1.0" encoding="utf-8"?>
-<p:sld xmlns:a="http://schemas.openxmlformats.org/drawingml/2006/main" xmlns:r="http://schemas.openxmlformats.org/officeDocument/2006/relationships" xmlns:p="http://schemas.openxmlformats.org/presentationml/2006/main">
-  <p:cSld>
-    <p:spTree>
-      <p:nvGrpSpPr>
-        <p:cNvPr id="1" name=""/>
-        <p:cNvGrpSpPr/>
-        <p:nvPr/>
-      </p:nvGrpSpPr>
-      <p:grpSpPr>
-        <a:xfrm>
-          <a:off x="0" y="0"/>
-          <a:ext cx="0" cy="0"/>
-          <a:chOff x="0" y="0"/>
-          <a:chExt cx="0" cy="0"/>
-        </a:xfrm>
-      </p:grpSpPr>
-      <p:pic>
-        <p:nvPicPr>
-          <p:cNvPr id="2" name="Slide 29"/>
           <p:cNvPicPr>
             <a:picLocks noChangeAspect="1"/>
           </p:cNvPicPr>
